--- a/docs/architecture-graph/DataVault-Architecture.pptx
+++ b/docs/architecture-graph/DataVault-Architecture.pptx
@@ -159,7 +159,7 @@
 <file path=ppt/revisionInfo.xml><?xml version="1.0" encoding="utf-8"?>
 <p1510:revInfo xmlns:a="http://schemas.openxmlformats.org/drawingml/2006/main" xmlns:r="http://schemas.openxmlformats.org/officeDocument/2006/relationships" xmlns:p1510="http://schemas.microsoft.com/office/powerpoint/2015/10/main">
   <p1510:revLst>
-    <p1510:client id="{7B7A63AC-8CC9-4A1B-96E2-BD0E655B6E1E}" v="1" dt="2026-08-25T06:23:31.274"/>
+    <p1510:client id="{7B7A63AC-8CC9-4A1B-96E2-BD0E655B6E1E}" v="2" dt="2026-08-25T13:02:26.769"/>
   </p1510:revLst>
 </p1510:revInfo>
 </file>
@@ -169,10 +169,33 @@
   <pc:docChgLst>
     <pc:chgData name="samsynexc2@outlook.com" userId="e5d54069826264b7" providerId="LiveId" clId="{BE300FA2-E2D7-44DB-B031-7479FCAE4FAB}"/>
     <pc:docChg chg="custSel delSld modSld">
-      <pc:chgData name="samsynexc2@outlook.com" userId="e5d54069826264b7" providerId="LiveId" clId="{BE300FA2-E2D7-44DB-B031-7479FCAE4FAB}" dt="2026-08-25T06:24:29.759" v="35" actId="2696"/>
+      <pc:chgData name="samsynexc2@outlook.com" userId="e5d54069826264b7" providerId="LiveId" clId="{BE300FA2-E2D7-44DB-B031-7479FCAE4FAB}" dt="2026-08-25T13:03:48.897" v="41" actId="20577"/>
       <pc:docMkLst>
         <pc:docMk/>
       </pc:docMkLst>
+      <pc:sldChg chg="modSp mod">
+        <pc:chgData name="samsynexc2@outlook.com" userId="e5d54069826264b7" providerId="LiveId" clId="{BE300FA2-E2D7-44DB-B031-7479FCAE4FAB}" dt="2026-08-25T13:03:14.091" v="39" actId="20577"/>
+        <pc:sldMkLst>
+          <pc:docMk/>
+          <pc:sldMk cId="0" sldId="257"/>
+        </pc:sldMkLst>
+        <pc:spChg chg="mod">
+          <ac:chgData name="samsynexc2@outlook.com" userId="e5d54069826264b7" providerId="LiveId" clId="{BE300FA2-E2D7-44DB-B031-7479FCAE4FAB}" dt="2026-08-25T13:02:28.232" v="37" actId="20577"/>
+          <ac:spMkLst>
+            <pc:docMk/>
+            <pc:sldMk cId="0" sldId="257"/>
+            <ac:spMk id="6" creationId="{00000000-0000-0000-0000-000000000000}"/>
+          </ac:spMkLst>
+        </pc:spChg>
+        <pc:spChg chg="mod">
+          <ac:chgData name="samsynexc2@outlook.com" userId="e5d54069826264b7" providerId="LiveId" clId="{BE300FA2-E2D7-44DB-B031-7479FCAE4FAB}" dt="2026-08-25T13:03:14.091" v="39" actId="20577"/>
+          <ac:spMkLst>
+            <pc:docMk/>
+            <pc:sldMk cId="0" sldId="257"/>
+            <ac:spMk id="7" creationId="{00000000-0000-0000-0000-000000000000}"/>
+          </ac:spMkLst>
+        </pc:spChg>
+      </pc:sldChg>
       <pc:sldChg chg="delSp modSp mod">
         <pc:chgData name="samsynexc2@outlook.com" userId="e5d54069826264b7" providerId="LiveId" clId="{BE300FA2-E2D7-44DB-B031-7479FCAE4FAB}" dt="2026-08-25T06:20:39.031" v="8" actId="14100"/>
         <pc:sldMkLst>
@@ -234,6 +257,21 @@
             <ac:picMk id="8" creationId="{00000000-0000-0000-0000-000000000000}"/>
           </ac:picMkLst>
         </pc:picChg>
+      </pc:sldChg>
+      <pc:sldChg chg="modSp mod">
+        <pc:chgData name="samsynexc2@outlook.com" userId="e5d54069826264b7" providerId="LiveId" clId="{BE300FA2-E2D7-44DB-B031-7479FCAE4FAB}" dt="2026-08-25T13:03:48.897" v="41" actId="20577"/>
+        <pc:sldMkLst>
+          <pc:docMk/>
+          <pc:sldMk cId="0" sldId="272"/>
+        </pc:sldMkLst>
+        <pc:graphicFrameChg chg="modGraphic">
+          <ac:chgData name="samsynexc2@outlook.com" userId="e5d54069826264b7" providerId="LiveId" clId="{BE300FA2-E2D7-44DB-B031-7479FCAE4FAB}" dt="2026-08-25T13:03:48.897" v="41" actId="20577"/>
+          <ac:graphicFrameMkLst>
+            <pc:docMk/>
+            <pc:sldMk cId="0" sldId="272"/>
+            <ac:graphicFrameMk id="6" creationId="{00000000-0000-0000-0000-000000000000}"/>
+          </ac:graphicFrameMkLst>
+        </pc:graphicFrameChg>
       </pc:sldChg>
       <pc:sldChg chg="modSp del mod">
         <pc:chgData name="samsynexc2@outlook.com" userId="e5d54069826264b7" providerId="LiveId" clId="{BE300FA2-E2D7-44DB-B031-7479FCAE4FAB}" dt="2026-08-25T06:24:29.759" v="35" actId="2696"/>
@@ -6210,7 +6248,13 @@
           <p:cNvGraphicFramePr>
             <a:graphicFrameLocks noGrp="1"/>
           </p:cNvGraphicFramePr>
-          <p:nvPr/>
+          <p:nvPr>
+            <p:extLst>
+              <p:ext uri="{D42A27DB-BD31-4B8C-83A1-F6EECF244321}">
+                <p14:modId xmlns:p14="http://schemas.microsoft.com/office/powerpoint/2010/main" val="1171501129"/>
+              </p:ext>
+            </p:extLst>
+          </p:nvPr>
         </p:nvGraphicFramePr>
         <p:xfrm>
           <a:off x="502920" y="1527048"/>
@@ -6245,7 +6289,7 @@
                     <a:lstStyle/>
                     <a:p>
                       <a:r>
-                        <a:rPr sz="1300" b="1">
+                        <a:rPr sz="1300" b="1" dirty="0">
                           <a:solidFill>
                             <a:srgbClr val="FFFFFF"/>
                           </a:solidFill>
@@ -6369,14 +6413,29 @@
                     <a:lstStyle/>
                     <a:p>
                       <a:r>
-                        <a:rPr sz="1300" b="0">
+                        <a:rPr sz="1300" b="0" dirty="0">
                           <a:solidFill>
                             <a:srgbClr val="48564D"/>
                           </a:solidFill>
                           <a:latin typeface="Segoe UI"/>
                         </a:rPr>
-                        <a:t>Confirmed — region us-east-2 (ECR/ECS); client-service default region ap-south-1</a:t>
+                        <a:t>Confirmed — region us-east-2</a:t>
                       </a:r>
+                      <a:r>
+                        <a:rPr lang="en-IN" sz="1300" b="0">
+                          <a:solidFill>
+                            <a:srgbClr val="48564D"/>
+                          </a:solidFill>
+                          <a:latin typeface="Segoe UI"/>
+                        </a:rPr>
+                        <a:t>.</a:t>
+                      </a:r>
+                      <a:endParaRPr sz="1300" b="0" dirty="0">
+                        <a:solidFill>
+                          <a:srgbClr val="48564D"/>
+                        </a:solidFill>
+                        <a:latin typeface="Segoe UI"/>
+                      </a:endParaRPr>
                     </a:p>
                   </a:txBody>
                   <a:tcPr anchor="ctr">
@@ -8028,7 +8087,7 @@
         <p:spPr>
           <a:xfrm>
             <a:off x="502920" y="1344168"/>
-            <a:ext cx="11185855" cy="457200"/>
+            <a:ext cx="11185855" cy="477054"/>
           </a:xfrm>
           <a:prstGeom prst="rect">
             <a:avLst/>
@@ -8041,15 +8100,36 @@
           </a:bodyPr>
           <a:lstStyle/>
           <a:p>
-            <a:pPr algn="l"/>
-            <a:r>
-              <a:rPr sz="1500" b="0">
-                <a:solidFill>
-                  <a:srgbClr val="48564D"/>
-                </a:solidFill>
-                <a:latin typeface="Segoe UI"/>
-              </a:rPr>
-              <a:t>DataVault is a two-service Node.js/TypeScript platform that backs up, archives, and restores Salesforce org data into a Hudi-based data lake on S3.</a:t>
+            <a:r>
+              <a:rPr sz="1500" b="0" dirty="0" err="1">
+                <a:solidFill>
+                  <a:srgbClr val="48564D"/>
+                </a:solidFill>
+                <a:latin typeface="Segoe UI"/>
+              </a:rPr>
+              <a:t>DataVault</a:t>
+            </a:r>
+            <a:r>
+              <a:rPr sz="1500" b="0" dirty="0">
+                <a:solidFill>
+                  <a:srgbClr val="48564D"/>
+                </a:solidFill>
+                <a:latin typeface="Segoe UI"/>
+              </a:rPr>
+              <a:t> is a </a:t>
+            </a:r>
+            <a:r>
+              <a:rPr lang="en-IN" sz="1600" dirty="0"/>
+              <a:t>two primary Node.js/TypeScript runtime services, plus the Java/Spark EMR processing application </a:t>
+            </a:r>
+            <a:r>
+              <a:rPr sz="1500" b="0" dirty="0">
+                <a:solidFill>
+                  <a:srgbClr val="48564D"/>
+                </a:solidFill>
+                <a:latin typeface="Segoe UI"/>
+              </a:rPr>
+              <a:t>that backs up, archives, and restores Salesforce org data into a Hudi-based data lake on S3.</a:t>
             </a:r>
           </a:p>
         </p:txBody>
@@ -8063,7 +8143,7 @@
         <p:spPr>
           <a:xfrm>
             <a:off x="502920" y="1847088"/>
-            <a:ext cx="11185855" cy="4937760"/>
+            <a:ext cx="11185855" cy="3262432"/>
           </a:xfrm>
           <a:prstGeom prst="rect">
             <a:avLst/>
@@ -8082,7 +8162,7 @@
               </a:spcAft>
             </a:pPr>
             <a:r>
-              <a:rPr sz="1450" b="1">
+              <a:rPr sz="1450" b="1" dirty="0">
                 <a:solidFill>
                   <a:srgbClr val="9C6E2A"/>
                 </a:solidFill>
@@ -8091,7 +8171,7 @@
               <a:t>—  </a:t>
             </a:r>
             <a:r>
-              <a:rPr sz="1450" b="0">
+              <a:rPr sz="1450" b="0" dirty="0">
                 <a:solidFill>
                   <a:srgbClr val="48564D"/>
                 </a:solidFill>
@@ -8100,7 +8180,7 @@
               <a:t>Two runtime services exist: </a:t>
             </a:r>
             <a:r>
-              <a:rPr sz="1450" b="1">
+              <a:rPr sz="1450" b="1" dirty="0">
                 <a:solidFill>
                   <a:srgbClr val="16211C"/>
                 </a:solidFill>
@@ -8109,7 +8189,7 @@
               <a:t>client-service</a:t>
             </a:r>
             <a:r>
-              <a:rPr sz="1450" b="0">
+              <a:rPr sz="1450" b="0" dirty="0">
                 <a:solidFill>
                   <a:srgbClr val="48564D"/>
                 </a:solidFill>
@@ -8118,7 +8198,7 @@
               <a:t> (EC2, PM2) and </a:t>
             </a:r>
             <a:r>
-              <a:rPr sz="1450" b="1">
+              <a:rPr sz="1450" b="1" dirty="0">
                 <a:solidFill>
                   <a:srgbClr val="16211C"/>
                 </a:solidFill>
@@ -8127,7 +8207,7 @@
               <a:t>backup-service</a:t>
             </a:r>
             <a:r>
-              <a:rPr sz="1450" b="0">
+              <a:rPr sz="1450" b="0" dirty="0">
                 <a:solidFill>
                   <a:srgbClr val="48564D"/>
                 </a:solidFill>
@@ -8143,7 +8223,7 @@
               </a:spcAft>
             </a:pPr>
             <a:r>
-              <a:rPr sz="1450" b="1">
+              <a:rPr sz="1450" b="1" dirty="0">
                 <a:solidFill>
                   <a:srgbClr val="9C6E2A"/>
                 </a:solidFill>
@@ -8152,7 +8232,7 @@
               <a:t>—  </a:t>
             </a:r>
             <a:r>
-              <a:rPr sz="1450" b="0">
+              <a:rPr sz="1450" b="0" dirty="0">
                 <a:solidFill>
                   <a:srgbClr val="48564D"/>
                 </a:solidFill>
@@ -8161,7 +8241,7 @@
               <a:t>client-service is the </a:t>
             </a:r>
             <a:r>
-              <a:rPr sz="1450" b="1">
+              <a:rPr sz="1450" b="1" dirty="0">
                 <a:solidFill>
                   <a:srgbClr val="16211C"/>
                 </a:solidFill>
@@ -8170,7 +8250,7 @@
               <a:t>API/orchestration/auth layer</a:t>
             </a:r>
             <a:r>
-              <a:rPr sz="1450" b="0">
+              <a:rPr sz="1450" b="0" dirty="0">
                 <a:solidFill>
                   <a:srgbClr val="48564D"/>
                 </a:solidFill>
@@ -8186,7 +8266,7 @@
               </a:spcAft>
             </a:pPr>
             <a:r>
-              <a:rPr sz="1450" b="1">
+              <a:rPr sz="1450" b="1" dirty="0">
                 <a:solidFill>
                   <a:srgbClr val="9C6E2A"/>
                 </a:solidFill>
@@ -8195,7 +8275,7 @@
               <a:t>—  </a:t>
             </a:r>
             <a:r>
-              <a:rPr sz="1450" b="0">
+              <a:rPr sz="1450" b="0" dirty="0">
                 <a:solidFill>
                   <a:srgbClr val="48564D"/>
                 </a:solidFill>
@@ -8204,7 +8284,7 @@
               <a:t>backup-service is the </a:t>
             </a:r>
             <a:r>
-              <a:rPr sz="1450" b="1">
+              <a:rPr sz="1450" b="1" dirty="0">
                 <a:solidFill>
                   <a:srgbClr val="16211C"/>
                 </a:solidFill>
@@ -8213,7 +8293,7 @@
               <a:t>data-movement worker</a:t>
             </a:r>
             <a:r>
-              <a:rPr sz="1450" b="0">
+              <a:rPr sz="1450" b="0" dirty="0">
                 <a:solidFill>
                   <a:srgbClr val="48564D"/>
                 </a:solidFill>
@@ -8229,7 +8309,7 @@
               </a:spcAft>
             </a:pPr>
             <a:r>
-              <a:rPr sz="1450" b="1">
+              <a:rPr sz="1450" b="1" dirty="0">
                 <a:solidFill>
                   <a:srgbClr val="9C6E2A"/>
                 </a:solidFill>
@@ -8238,7 +8318,7 @@
               <a:t>—  </a:t>
             </a:r>
             <a:r>
-              <a:rPr sz="1450" b="0">
+              <a:rPr sz="1450" b="0" dirty="0">
                 <a:solidFill>
                   <a:srgbClr val="48564D"/>
                 </a:solidFill>
@@ -8247,7 +8327,7 @@
               <a:t>Salesforce connects via </a:t>
             </a:r>
             <a:r>
-              <a:rPr sz="1450" b="1">
+              <a:rPr sz="1450" b="1" dirty="0">
                 <a:solidFill>
                   <a:srgbClr val="16211C"/>
                 </a:solidFill>
@@ -8256,7 +8336,7 @@
               <a:t>OAuth 2.0 with PKCE</a:t>
             </a:r>
             <a:r>
-              <a:rPr sz="1450" b="0">
+              <a:rPr sz="1450" b="0" dirty="0">
                 <a:solidFill>
                   <a:srgbClr val="48564D"/>
                 </a:solidFill>
@@ -8265,7 +8345,7 @@
               <a:t> plus a pre-packaged </a:t>
             </a:r>
             <a:r>
-              <a:rPr sz="1450" b="1">
+              <a:rPr sz="1450" b="1" dirty="0">
                 <a:solidFill>
                   <a:srgbClr val="16211C"/>
                 </a:solidFill>
@@ -8274,7 +8354,7 @@
               <a:t>External Client App (ECA)</a:t>
             </a:r>
             <a:r>
-              <a:rPr sz="1450" b="0">
+              <a:rPr sz="1450" b="0" dirty="0">
                 <a:solidFill>
                   <a:srgbClr val="48564D"/>
                 </a:solidFill>
@@ -8290,7 +8370,7 @@
               </a:spcAft>
             </a:pPr>
             <a:r>
-              <a:rPr sz="1450" b="1">
+              <a:rPr sz="1450" b="1" dirty="0">
                 <a:solidFill>
                   <a:srgbClr val="9C6E2A"/>
                 </a:solidFill>
@@ -8299,7 +8379,7 @@
               <a:t>—  </a:t>
             </a:r>
             <a:r>
-              <a:rPr sz="1450" b="0">
+              <a:rPr sz="1450" b="0" dirty="0">
                 <a:solidFill>
                   <a:srgbClr val="48564D"/>
                 </a:solidFill>
@@ -8308,7 +8388,7 @@
               <a:t>The two services talk over </a:t>
             </a:r>
             <a:r>
-              <a:rPr sz="1450" b="1">
+              <a:rPr sz="1450" b="1" dirty="0">
                 <a:solidFill>
                   <a:srgbClr val="16211C"/>
                 </a:solidFill>
@@ -8317,7 +8397,7 @@
               <a:t>HTTPS with a shared-secret header</a:t>
             </a:r>
             <a:r>
-              <a:rPr sz="1450" b="0">
+              <a:rPr sz="1450" b="0" dirty="0">
                 <a:solidFill>
                   <a:srgbClr val="48564D"/>
                 </a:solidFill>
@@ -8326,7 +8406,7 @@
               <a:t> (</a:t>
             </a:r>
             <a:r>
-              <a:rPr sz="1350">
+              <a:rPr sz="1350" dirty="0">
                 <a:solidFill>
                   <a:srgbClr val="2F6B59"/>
                 </a:solidFill>
@@ -8335,7 +8415,7 @@
               <a:t>X-Internal-Secret</a:t>
             </a:r>
             <a:r>
-              <a:rPr sz="1450" b="0">
+              <a:rPr sz="1450" b="0" dirty="0">
                 <a:solidFill>
                   <a:srgbClr val="48564D"/>
                 </a:solidFill>
@@ -8344,7 +8424,7 @@
               <a:t>, </a:t>
             </a:r>
             <a:r>
-              <a:rPr sz="1350">
+              <a:rPr sz="1350" dirty="0" err="1">
                 <a:solidFill>
                   <a:srgbClr val="2F6B59"/>
                 </a:solidFill>
@@ -8353,7 +8433,7 @@
               <a:t>timingSafeEqual</a:t>
             </a:r>
             <a:r>
-              <a:rPr sz="1450" b="0">
+              <a:rPr sz="1450" b="0" dirty="0">
                 <a:solidFill>
                   <a:srgbClr val="48564D"/>
                 </a:solidFill>
@@ -8369,7 +8449,7 @@
               </a:spcAft>
             </a:pPr>
             <a:r>
-              <a:rPr sz="1450" b="1">
+              <a:rPr sz="1450" b="1" dirty="0">
                 <a:solidFill>
                   <a:srgbClr val="9C6E2A"/>
                 </a:solidFill>
@@ -8378,7 +8458,7 @@
               <a:t>—  </a:t>
             </a:r>
             <a:r>
-              <a:rPr sz="1450" b="0">
+              <a:rPr sz="1450" b="0" dirty="0">
                 <a:solidFill>
                   <a:srgbClr val="48564D"/>
                 </a:solidFill>
@@ -8387,7 +8467,7 @@
               <a:t>The Hudi write path runs as a </a:t>
             </a:r>
             <a:r>
-              <a:rPr sz="1450" b="1">
+              <a:rPr sz="1450" b="1" dirty="0">
                 <a:solidFill>
                   <a:srgbClr val="16211C"/>
                 </a:solidFill>
@@ -8396,7 +8476,7 @@
               <a:t>Java/Spark job on EMR Serverless</a:t>
             </a:r>
             <a:r>
-              <a:rPr sz="1450" b="0">
+              <a:rPr sz="1450" b="0" dirty="0">
                 <a:solidFill>
                   <a:srgbClr val="48564D"/>
                 </a:solidFill>
@@ -8405,7 +8485,7 @@
               <a:t> — record key </a:t>
             </a:r>
             <a:r>
-              <a:rPr sz="1350">
+              <a:rPr sz="1350" dirty="0">
                 <a:solidFill>
                   <a:srgbClr val="2F6B59"/>
                 </a:solidFill>
@@ -8414,16 +8494,34 @@
               <a:t>Id</a:t>
             </a:r>
             <a:r>
-              <a:rPr sz="1450" b="0">
-                <a:solidFill>
-                  <a:srgbClr val="48564D"/>
-                </a:solidFill>
-                <a:latin typeface="Segoe UI"/>
-              </a:rPr>
-              <a:t>, precombine </a:t>
-            </a:r>
-            <a:r>
-              <a:rPr sz="1350">
+              <a:rPr sz="1450" b="0" dirty="0">
+                <a:solidFill>
+                  <a:srgbClr val="48564D"/>
+                </a:solidFill>
+                <a:latin typeface="Segoe UI"/>
+              </a:rPr>
+              <a:t>, </a:t>
+            </a:r>
+            <a:r>
+              <a:rPr sz="1450" b="0" dirty="0" err="1">
+                <a:solidFill>
+                  <a:srgbClr val="48564D"/>
+                </a:solidFill>
+                <a:latin typeface="Segoe UI"/>
+              </a:rPr>
+              <a:t>precombine</a:t>
+            </a:r>
+            <a:r>
+              <a:rPr sz="1450" b="0" dirty="0">
+                <a:solidFill>
+                  <a:srgbClr val="48564D"/>
+                </a:solidFill>
+                <a:latin typeface="Segoe UI"/>
+              </a:rPr>
+              <a:t> </a:t>
+            </a:r>
+            <a:r>
+              <a:rPr sz="1350" dirty="0" err="1">
                 <a:solidFill>
                   <a:srgbClr val="2F6B59"/>
                 </a:solidFill>
@@ -8432,7 +8530,7 @@
               <a:t>LastModifiedDate</a:t>
             </a:r>
             <a:r>
-              <a:rPr sz="1450" b="0">
+              <a:rPr sz="1450" b="0" dirty="0">
                 <a:solidFill>
                   <a:srgbClr val="48564D"/>
                 </a:solidFill>
@@ -8448,7 +8546,7 @@
               </a:spcAft>
             </a:pPr>
             <a:r>
-              <a:rPr sz="1450" b="1">
+              <a:rPr sz="1450" b="1" dirty="0">
                 <a:solidFill>
                   <a:srgbClr val="9C6E2A"/>
                 </a:solidFill>
@@ -8457,7 +8555,7 @@
               <a:t>—  </a:t>
             </a:r>
             <a:r>
-              <a:rPr sz="1450" b="0">
+              <a:rPr sz="1450" b="0" dirty="0">
                 <a:solidFill>
                   <a:srgbClr val="48564D"/>
                 </a:solidFill>
@@ -8466,7 +8564,7 @@
               <a:t>Storage of record/config state is </a:t>
             </a:r>
             <a:r>
-              <a:rPr sz="1450" b="1">
+              <a:rPr sz="1450" b="1" dirty="0">
                 <a:solidFill>
                   <a:srgbClr val="16211C"/>
                 </a:solidFill>
@@ -8475,32 +8573,20 @@
               <a:t>DynamoDB exclusively</a:t>
             </a:r>
             <a:r>
-              <a:rPr sz="1450" b="0">
-                <a:solidFill>
-                  <a:srgbClr val="48564D"/>
-                </a:solidFill>
-                <a:latin typeface="Segoe UI"/>
-              </a:rPr>
-              <a:t> (14 tables, </a:t>
-            </a:r>
-            <a:r>
-              <a:rPr sz="1350">
-                <a:solidFill>
-                  <a:srgbClr val="2F6B59"/>
-                </a:solidFill>
-                <a:latin typeface="Consolas"/>
-              </a:rPr>
-              <a:t>PAY_PER_REQUEST</a:t>
-            </a:r>
-            <a:r>
-              <a:rPr sz="1450" b="0">
-                <a:solidFill>
-                  <a:srgbClr val="48564D"/>
-                </a:solidFill>
-                <a:latin typeface="Segoe UI"/>
-              </a:rPr>
-              <a:t>).</a:t>
-            </a:r>
+              <a:rPr lang="en-IN" sz="1450" b="1" dirty="0">
+                <a:solidFill>
+                  <a:srgbClr val="16211C"/>
+                </a:solidFill>
+                <a:latin typeface="Segoe UI"/>
+              </a:rPr>
+              <a:t>.</a:t>
+            </a:r>
+            <a:endParaRPr sz="1450" b="0" dirty="0">
+              <a:solidFill>
+                <a:srgbClr val="48564D"/>
+              </a:solidFill>
+              <a:latin typeface="Segoe UI"/>
+            </a:endParaRPr>
           </a:p>
           <a:p>
             <a:pPr>
@@ -8509,7 +8595,7 @@
               </a:spcAft>
             </a:pPr>
             <a:r>
-              <a:rPr sz="1450" b="1">
+              <a:rPr sz="1450" b="1" dirty="0">
                 <a:solidFill>
                   <a:srgbClr val="9C6E2A"/>
                 </a:solidFill>
@@ -8518,7 +8604,7 @@
               <a:t>—  </a:t>
             </a:r>
             <a:r>
-              <a:rPr sz="1450" b="0">
+              <a:rPr sz="1450" b="0" dirty="0">
                 <a:solidFill>
                   <a:srgbClr val="48564D"/>
                 </a:solidFill>
@@ -8527,16 +8613,25 @@
               <a:t>Scheduling is </a:t>
             </a:r>
             <a:r>
-              <a:rPr sz="1350">
+              <a:rPr sz="1350" dirty="0">
                 <a:solidFill>
                   <a:srgbClr val="2F6B59"/>
                 </a:solidFill>
                 <a:latin typeface="Consolas"/>
               </a:rPr>
-              <a:t>node-cron</a:t>
-            </a:r>
-            <a:r>
-              <a:rPr sz="1450" b="0">
+              <a:t>node-</a:t>
+            </a:r>
+            <a:r>
+              <a:rPr sz="1350" dirty="0" err="1">
+                <a:solidFill>
+                  <a:srgbClr val="2F6B59"/>
+                </a:solidFill>
+                <a:latin typeface="Consolas"/>
+              </a:rPr>
+              <a:t>cron</a:t>
+            </a:r>
+            <a:r>
+              <a:rPr sz="1450" b="0" dirty="0">
                 <a:solidFill>
                   <a:srgbClr val="48564D"/>
                 </a:solidFill>
@@ -8545,16 +8640,25 @@
               <a:t> + </a:t>
             </a:r>
             <a:r>
-              <a:rPr sz="1350">
+              <a:rPr sz="1350" dirty="0" err="1">
                 <a:solidFill>
                   <a:srgbClr val="2F6B59"/>
                 </a:solidFill>
                 <a:latin typeface="Consolas"/>
               </a:rPr>
-              <a:t>EventBridge Scheduler</a:t>
-            </a:r>
-            <a:r>
-              <a:rPr sz="1450" b="0">
+              <a:t>EventBridge</a:t>
+            </a:r>
+            <a:r>
+              <a:rPr sz="1350" dirty="0">
+                <a:solidFill>
+                  <a:srgbClr val="2F6B59"/>
+                </a:solidFill>
+                <a:latin typeface="Consolas"/>
+              </a:rPr>
+              <a:t> Scheduler</a:t>
+            </a:r>
+            <a:r>
+              <a:rPr sz="1450" b="0" dirty="0">
                 <a:solidFill>
                   <a:srgbClr val="48564D"/>
                 </a:solidFill>
